--- a/symposium/18th/img/cover.pptx
+++ b/symposium/18th/img/cover.pptx
@@ -3070,7 +3070,7 @@
                 <a:ea typeface="나눔스퀘어 Bold" panose="020B0600000101010101" pitchFamily="50" charset="-127"/>
                 <a:cs typeface="Times New Roman" panose="02020603050405020304" pitchFamily="18" charset="0"/>
               </a:rPr>
-              <a:t>2026 19</a:t>
+              <a:t>2026 18</a:t>
             </a:r>
             <a:r>
               <a:rPr lang="en-US" altLang="ko-KR" sz="2400" b="1" baseline="30000" dirty="0">
@@ -3115,7 +3115,7 @@
                 <a:latin typeface="Titillium Web" panose="00000500000000000000" pitchFamily="2" charset="0"/>
                 <a:cs typeface="Times New Roman" panose="02020603050405020304" pitchFamily="18" charset="0"/>
               </a:rPr>
-              <a:t>, July 23, </a:t>
+              <a:t>, May 28, </a:t>
             </a:r>
             <a:r>
               <a:rPr lang="en-US" altLang="ko-KR" sz="1400" b="1" dirty="0">
